--- a/dimensionality_reduction.pptx
+++ b/dimensionality_reduction.pptx
@@ -403,7 +403,7 @@
           <a:p>
             <a:fld id="{FD4ECF9F-6433-47AA-8792-63EFAF83C877}" type="datetimeFigureOut">
               <a:rPr lang="en-US" smtClean="0"/>
-              <a:t>2023-03-02</a:t>
+              <a:t>2026-10-15</a:t>
             </a:fld>
             <a:endParaRPr lang="en-US"/>
           </a:p>
@@ -601,7 +601,7 @@
           <a:p>
             <a:fld id="{FD4ECF9F-6433-47AA-8792-63EFAF83C877}" type="datetimeFigureOut">
               <a:rPr lang="en-US" smtClean="0"/>
-              <a:t>2023-03-02</a:t>
+              <a:t>2026-10-15</a:t>
             </a:fld>
             <a:endParaRPr lang="en-US"/>
           </a:p>
@@ -809,7 +809,7 @@
           <a:p>
             <a:fld id="{FD4ECF9F-6433-47AA-8792-63EFAF83C877}" type="datetimeFigureOut">
               <a:rPr lang="en-US" smtClean="0"/>
-              <a:t>2023-03-02</a:t>
+              <a:t>2026-10-15</a:t>
             </a:fld>
             <a:endParaRPr lang="en-US"/>
           </a:p>
@@ -1007,7 +1007,7 @@
           <a:p>
             <a:fld id="{FD4ECF9F-6433-47AA-8792-63EFAF83C877}" type="datetimeFigureOut">
               <a:rPr lang="en-US" smtClean="0"/>
-              <a:t>2023-03-02</a:t>
+              <a:t>2026-10-15</a:t>
             </a:fld>
             <a:endParaRPr lang="en-US"/>
           </a:p>
@@ -1282,7 +1282,7 @@
           <a:p>
             <a:fld id="{FD4ECF9F-6433-47AA-8792-63EFAF83C877}" type="datetimeFigureOut">
               <a:rPr lang="en-US" smtClean="0"/>
-              <a:t>2023-03-02</a:t>
+              <a:t>2026-10-15</a:t>
             </a:fld>
             <a:endParaRPr lang="en-US"/>
           </a:p>
@@ -1547,7 +1547,7 @@
           <a:p>
             <a:fld id="{FD4ECF9F-6433-47AA-8792-63EFAF83C877}" type="datetimeFigureOut">
               <a:rPr lang="en-US" smtClean="0"/>
-              <a:t>2023-03-02</a:t>
+              <a:t>2026-10-15</a:t>
             </a:fld>
             <a:endParaRPr lang="en-US"/>
           </a:p>
@@ -1959,7 +1959,7 @@
           <a:p>
             <a:fld id="{FD4ECF9F-6433-47AA-8792-63EFAF83C877}" type="datetimeFigureOut">
               <a:rPr lang="en-US" smtClean="0"/>
-              <a:t>2023-03-02</a:t>
+              <a:t>2026-10-15</a:t>
             </a:fld>
             <a:endParaRPr lang="en-US"/>
           </a:p>
@@ -2100,7 +2100,7 @@
           <a:p>
             <a:fld id="{FD4ECF9F-6433-47AA-8792-63EFAF83C877}" type="datetimeFigureOut">
               <a:rPr lang="en-US" smtClean="0"/>
-              <a:t>2023-03-02</a:t>
+              <a:t>2026-10-15</a:t>
             </a:fld>
             <a:endParaRPr lang="en-US"/>
           </a:p>
@@ -2213,7 +2213,7 @@
           <a:p>
             <a:fld id="{FD4ECF9F-6433-47AA-8792-63EFAF83C877}" type="datetimeFigureOut">
               <a:rPr lang="en-US" smtClean="0"/>
-              <a:t>2023-03-02</a:t>
+              <a:t>2026-10-15</a:t>
             </a:fld>
             <a:endParaRPr lang="en-US"/>
           </a:p>
@@ -2524,7 +2524,7 @@
           <a:p>
             <a:fld id="{FD4ECF9F-6433-47AA-8792-63EFAF83C877}" type="datetimeFigureOut">
               <a:rPr lang="en-US" smtClean="0"/>
-              <a:t>2023-03-02</a:t>
+              <a:t>2026-10-15</a:t>
             </a:fld>
             <a:endParaRPr lang="en-US"/>
           </a:p>
@@ -2812,7 +2812,7 @@
           <a:p>
             <a:fld id="{FD4ECF9F-6433-47AA-8792-63EFAF83C877}" type="datetimeFigureOut">
               <a:rPr lang="en-US" smtClean="0"/>
-              <a:t>2023-03-02</a:t>
+              <a:t>2026-10-15</a:t>
             </a:fld>
             <a:endParaRPr lang="en-US"/>
           </a:p>
@@ -3053,7 +3053,7 @@
           <a:p>
             <a:fld id="{FD4ECF9F-6433-47AA-8792-63EFAF83C877}" type="datetimeFigureOut">
               <a:rPr lang="en-US" smtClean="0"/>
-              <a:t>2023-03-02</a:t>
+              <a:t>2026-10-15</a:t>
             </a:fld>
             <a:endParaRPr lang="en-US"/>
           </a:p>
@@ -8889,6 +8889,33 @@
                                               <p:pRg st="5" end="5"/>
                                             </p:txEl>
                                           </p:spTgt>
+                                        </p:tgtEl>
+                                        <p:attrNameLst>
+                                          <p:attrName>style.visibility</p:attrName>
+                                        </p:attrNameLst>
+                                      </p:cBhvr>
+                                      <p:to>
+                                        <p:strVal val="visible"/>
+                                      </p:to>
+                                    </p:set>
+                                  </p:childTnLst>
+                                </p:cTn>
+                              </p:par>
+                              <p:par>
+                                <p:cTn id="19" presetID="1" presetClass="entr" presetSubtype="0" fill="hold" nodeType="withEffect">
+                                  <p:stCondLst>
+                                    <p:cond delay="0"/>
+                                  </p:stCondLst>
+                                  <p:childTnLst>
+                                    <p:set>
+                                      <p:cBhvr>
+                                        <p:cTn id="20" dur="1" fill="hold">
+                                          <p:stCondLst>
+                                            <p:cond delay="0"/>
+                                          </p:stCondLst>
+                                        </p:cTn>
+                                        <p:tgtEl>
+                                          <p:spTgt spid="5"/>
                                         </p:tgtEl>
                                         <p:attrNameLst>
                                           <p:attrName>style.visibility</p:attrName>
@@ -17756,10 +17783,7 @@
                 <a:pPr/>
                 <a14:m>
                   <m:oMathPara xmlns:m="http://schemas.openxmlformats.org/officeDocument/2006/math">
-                    <m:oMathParaPr>
-                      <m:jc m:val="centerGroup"/>
-                    </m:oMathParaPr>
-                    <m:oMath xmlns:m="http://schemas.openxmlformats.org/officeDocument/2006/math">
+                    <m:oMath>
                       <m:sSub>
                         <m:sSubPr>
                           <m:ctrlPr>
@@ -17945,6 +17969,7 @@
                                       <m:ctrlPr>
                                         <a:rPr lang="en-US" b="0" i="1" smtClean="0">
                                           <a:latin typeface="Cambria Math" panose="02040503050406030204" pitchFamily="18" charset="0"/>
+                                          <a:ea typeface="Cambria Math" panose="02040503050406030204" pitchFamily="18" charset="0"/>
                                         </a:rPr>
                                       </m:ctrlPr>
                                     </m:sSubSupPr>
@@ -18150,6 +18175,7 @@
                                           <m:ctrlPr>
                                             <a:rPr lang="en-US" b="0" i="1" smtClean="0">
                                               <a:latin typeface="Cambria Math" panose="02040503050406030204" pitchFamily="18" charset="0"/>
+                                              <a:ea typeface="Cambria Math" panose="02040503050406030204" pitchFamily="18" charset="0"/>
                                             </a:rPr>
                                           </m:ctrlPr>
                                         </m:sSubSupPr>
@@ -18273,14 +18299,11 @@
                 <a:pPr/>
                 <a14:m>
                   <m:oMathPara xmlns:m="http://schemas.openxmlformats.org/officeDocument/2006/math">
-                    <m:oMathParaPr>
-                      <m:jc m:val="centerGroup"/>
-                    </m:oMathParaPr>
-                    <m:oMath xmlns:m="http://schemas.openxmlformats.org/officeDocument/2006/math">
+                    <m:oMath>
                       <m:sSub>
                         <m:sSubPr>
                           <m:ctrlPr>
-                            <a:rPr lang="en-US" i="1" smtClean="0">
+                            <a:rPr lang="en-US" b="0" i="1" smtClean="0">
                               <a:latin typeface="Cambria Math" panose="02040503050406030204" pitchFamily="18" charset="0"/>
                             </a:rPr>
                           </m:ctrlPr>
@@ -18731,10 +18754,7 @@
                 <a:pPr/>
                 <a14:m>
                   <m:oMathPara xmlns:m="http://schemas.openxmlformats.org/officeDocument/2006/math">
-                    <m:oMathParaPr>
-                      <m:jc m:val="centerGroup"/>
-                    </m:oMathParaPr>
-                    <m:oMath xmlns:m="http://schemas.openxmlformats.org/officeDocument/2006/math">
+                    <m:oMath>
                       <m:r>
                         <m:rPr>
                           <m:sty m:val="p"/>
@@ -19518,13 +19538,13 @@
           <p:nvPr/>
         </p:nvPicPr>
         <p:blipFill>
-          <a:blip r:embed="rId3">
+          <a:blip>
             <a:extLst>
               <a:ext uri="{28A0092B-C50C-407E-A947-70E740481C1C}">
                 <a14:useLocalDpi xmlns:a14="http://schemas.microsoft.com/office/drawing/2010/main" val="0"/>
               </a:ext>
               <a:ext uri="{96DAC541-7B7A-43D3-8B79-37D633B846F1}">
-                <asvg:svgBlip xmlns:asvg="http://schemas.microsoft.com/office/drawing/2016/SVG/main" r:embed="rId4"/>
+                <asvg:svgBlip xmlns:asvg="http://schemas.microsoft.com/office/drawing/2016/SVG/main" r:embed="rId3"/>
               </a:ext>
             </a:extLst>
           </a:blip>
